--- a/Session8/AgentFramework.pptx
+++ b/Session8/AgentFramework.pptx
@@ -9,6 +9,12 @@
     <p:sldId id="257" r:id="rId3"/>
     <p:sldId id="268" r:id="rId4"/>
     <p:sldId id="263" r:id="rId5"/>
+    <p:sldId id="269" r:id="rId6"/>
+    <p:sldId id="270" r:id="rId7"/>
+    <p:sldId id="271" r:id="rId8"/>
+    <p:sldId id="272" r:id="rId9"/>
+    <p:sldId id="273" r:id="rId10"/>
+    <p:sldId id="274" r:id="rId11"/>
   </p:sldIdLst>
   <p:sldSz cx="12192000" cy="6858000"/>
   <p:notesSz cx="6858000" cy="9144000"/>
@@ -246,7 +252,7 @@
           <a:p>
             <a:fld id="{51CAB068-2450-4597-9EF5-5AF7E6E959B5}" type="datetimeFigureOut">
               <a:rPr lang="en-IN" smtClean="0"/>
-              <a:t>29-08-2026</a:t>
+              <a:t>02-09-2026</a:t>
             </a:fld>
             <a:endParaRPr lang="en-IN"/>
           </a:p>
@@ -416,7 +422,7 @@
           <a:p>
             <a:fld id="{51CAB068-2450-4597-9EF5-5AF7E6E959B5}" type="datetimeFigureOut">
               <a:rPr lang="en-IN" smtClean="0"/>
-              <a:t>29-08-2026</a:t>
+              <a:t>02-09-2026</a:t>
             </a:fld>
             <a:endParaRPr lang="en-IN"/>
           </a:p>
@@ -596,7 +602,7 @@
           <a:p>
             <a:fld id="{51CAB068-2450-4597-9EF5-5AF7E6E959B5}" type="datetimeFigureOut">
               <a:rPr lang="en-IN" smtClean="0"/>
-              <a:t>29-08-2026</a:t>
+              <a:t>02-09-2026</a:t>
             </a:fld>
             <a:endParaRPr lang="en-IN"/>
           </a:p>
@@ -766,7 +772,7 @@
           <a:p>
             <a:fld id="{51CAB068-2450-4597-9EF5-5AF7E6E959B5}" type="datetimeFigureOut">
               <a:rPr lang="en-IN" smtClean="0"/>
-              <a:t>29-08-2026</a:t>
+              <a:t>02-09-2026</a:t>
             </a:fld>
             <a:endParaRPr lang="en-IN"/>
           </a:p>
@@ -1012,7 +1018,7 @@
           <a:p>
             <a:fld id="{51CAB068-2450-4597-9EF5-5AF7E6E959B5}" type="datetimeFigureOut">
               <a:rPr lang="en-IN" smtClean="0"/>
-              <a:t>29-08-2026</a:t>
+              <a:t>02-09-2026</a:t>
             </a:fld>
             <a:endParaRPr lang="en-IN"/>
           </a:p>
@@ -1244,7 +1250,7 @@
           <a:p>
             <a:fld id="{51CAB068-2450-4597-9EF5-5AF7E6E959B5}" type="datetimeFigureOut">
               <a:rPr lang="en-IN" smtClean="0"/>
-              <a:t>29-08-2026</a:t>
+              <a:t>02-09-2026</a:t>
             </a:fld>
             <a:endParaRPr lang="en-IN"/>
           </a:p>
@@ -1611,7 +1617,7 @@
           <a:p>
             <a:fld id="{51CAB068-2450-4597-9EF5-5AF7E6E959B5}" type="datetimeFigureOut">
               <a:rPr lang="en-IN" smtClean="0"/>
-              <a:t>29-08-2026</a:t>
+              <a:t>02-09-2026</a:t>
             </a:fld>
             <a:endParaRPr lang="en-IN"/>
           </a:p>
@@ -1729,7 +1735,7 @@
           <a:p>
             <a:fld id="{51CAB068-2450-4597-9EF5-5AF7E6E959B5}" type="datetimeFigureOut">
               <a:rPr lang="en-IN" smtClean="0"/>
-              <a:t>29-08-2026</a:t>
+              <a:t>02-09-2026</a:t>
             </a:fld>
             <a:endParaRPr lang="en-IN"/>
           </a:p>
@@ -1824,7 +1830,7 @@
           <a:p>
             <a:fld id="{51CAB068-2450-4597-9EF5-5AF7E6E959B5}" type="datetimeFigureOut">
               <a:rPr lang="en-IN" smtClean="0"/>
-              <a:t>29-08-2026</a:t>
+              <a:t>02-09-2026</a:t>
             </a:fld>
             <a:endParaRPr lang="en-IN"/>
           </a:p>
@@ -2101,7 +2107,7 @@
           <a:p>
             <a:fld id="{51CAB068-2450-4597-9EF5-5AF7E6E959B5}" type="datetimeFigureOut">
               <a:rPr lang="en-IN" smtClean="0"/>
-              <a:t>29-08-2026</a:t>
+              <a:t>02-09-2026</a:t>
             </a:fld>
             <a:endParaRPr lang="en-IN"/>
           </a:p>
@@ -2354,7 +2360,7 @@
           <a:p>
             <a:fld id="{51CAB068-2450-4597-9EF5-5AF7E6E959B5}" type="datetimeFigureOut">
               <a:rPr lang="en-IN" smtClean="0"/>
-              <a:t>29-08-2026</a:t>
+              <a:t>02-09-2026</a:t>
             </a:fld>
             <a:endParaRPr lang="en-IN"/>
           </a:p>
@@ -2567,7 +2573,7 @@
           <a:p>
             <a:fld id="{51CAB068-2450-4597-9EF5-5AF7E6E959B5}" type="datetimeFigureOut">
               <a:rPr lang="en-IN" smtClean="0"/>
-              <a:t>29-08-2026</a:t>
+              <a:t>02-09-2026</a:t>
             </a:fld>
             <a:endParaRPr lang="en-IN"/>
           </a:p>
@@ -3040,6 +3046,130 @@
 </p:sld>
 </file>
 
+<file path=ppt/slides/slide10.xml><?xml version="1.0" encoding="utf-8"?>
+<p:sld xmlns:a="http://schemas.openxmlformats.org/drawingml/2006/main" xmlns:r="http://schemas.openxmlformats.org/officeDocument/2006/relationships" xmlns:p="http://schemas.openxmlformats.org/presentationml/2006/main">
+  <p:cSld>
+    <p:spTree>
+      <p:nvGrpSpPr>
+        <p:cNvPr id="1" name=""/>
+        <p:cNvGrpSpPr/>
+        <p:nvPr/>
+      </p:nvGrpSpPr>
+      <p:grpSpPr>
+        <a:xfrm>
+          <a:off x="0" y="0"/>
+          <a:ext cx="0" cy="0"/>
+          <a:chOff x="0" y="0"/>
+          <a:chExt cx="0" cy="0"/>
+        </a:xfrm>
+      </p:grpSpPr>
+      <p:sp>
+        <p:nvSpPr>
+          <p:cNvPr id="2" name="Title 1"/>
+          <p:cNvSpPr>
+            <a:spLocks noGrp="1"/>
+          </p:cNvSpPr>
+          <p:nvPr>
+            <p:ph type="title"/>
+          </p:nvPr>
+        </p:nvSpPr>
+        <p:spPr/>
+        <p:txBody>
+          <a:bodyPr/>
+          <a:lstStyle/>
+          <a:p>
+            <a:r>
+              <a:rPr lang="en-US" dirty="0" smtClean="0"/>
+              <a:t>Best Practice</a:t>
+            </a:r>
+            <a:endParaRPr lang="en-IN" dirty="0"/>
+          </a:p>
+        </p:txBody>
+      </p:sp>
+      <p:sp>
+        <p:nvSpPr>
+          <p:cNvPr id="3" name="Content Placeholder 2"/>
+          <p:cNvSpPr>
+            <a:spLocks noGrp="1"/>
+          </p:cNvSpPr>
+          <p:nvPr>
+            <p:ph idx="1"/>
+          </p:nvPr>
+        </p:nvSpPr>
+        <p:spPr/>
+        <p:txBody>
+          <a:bodyPr/>
+          <a:lstStyle/>
+          <a:p>
+            <a:r>
+              <a:rPr lang="en-US" dirty="0"/>
+              <a:t>Keep Very detailed description </a:t>
+            </a:r>
+          </a:p>
+          <a:p>
+            <a:r>
+              <a:rPr lang="en-IN" dirty="0"/>
+              <a:t>Keep plugins single-responsibility. </a:t>
+            </a:r>
+            <a:endParaRPr lang="en-IN" dirty="0"/>
+          </a:p>
+          <a:p>
+            <a:r>
+              <a:rPr lang="en-US" dirty="0"/>
+              <a:t>Separate read and write plugins</a:t>
+            </a:r>
+            <a:r>
+              <a:rPr lang="en-US" dirty="0"/>
+              <a:t>.</a:t>
+            </a:r>
+          </a:p>
+          <a:p>
+            <a:r>
+              <a:rPr lang="en-US" dirty="0"/>
+              <a:t>Always add agent responses back to </a:t>
+            </a:r>
+            <a:r>
+              <a:rPr lang="en-US" dirty="0" err="1"/>
+              <a:t>ChatHistory</a:t>
+            </a:r>
+            <a:r>
+              <a:rPr lang="en-US" dirty="0"/>
+              <a:t>.</a:t>
+            </a:r>
+          </a:p>
+          <a:p>
+            <a:r>
+              <a:rPr lang="en-US" dirty="0"/>
+              <a:t>Use </a:t>
+            </a:r>
+            <a:r>
+              <a:rPr lang="en-US" dirty="0" err="1"/>
+              <a:t>FunctionChoiceBehavior.None</a:t>
+            </a:r>
+            <a:r>
+              <a:rPr lang="en-US" dirty="0"/>
+              <a:t>() for debugging.</a:t>
+            </a:r>
+            <a:endParaRPr lang="en-US" dirty="0"/>
+          </a:p>
+          <a:p>
+            <a:endParaRPr lang="en-IN" dirty="0"/>
+          </a:p>
+        </p:txBody>
+      </p:sp>
+    </p:spTree>
+    <p:extLst>
+      <p:ext uri="{BB962C8B-B14F-4D97-AF65-F5344CB8AC3E}">
+        <p14:creationId xmlns:p14="http://schemas.microsoft.com/office/powerpoint/2010/main" val="591707143"/>
+      </p:ext>
+    </p:extLst>
+  </p:cSld>
+  <p:clrMapOvr>
+    <a:masterClrMapping/>
+  </p:clrMapOvr>
+</p:sld>
+</file>
+
 <file path=ppt/slides/slide2.xml><?xml version="1.0" encoding="utf-8"?>
 <p:sld xmlns:a="http://schemas.openxmlformats.org/drawingml/2006/main" xmlns:r="http://schemas.openxmlformats.org/officeDocument/2006/relationships" xmlns:p="http://schemas.openxmlformats.org/presentationml/2006/main">
   <p:cSld>
@@ -3079,11 +3209,7 @@
           <a:p>
             <a:r>
               <a:rPr lang="en-US" dirty="0" smtClean="0"/>
-              <a:t>Agent </a:t>
-            </a:r>
-            <a:r>
-              <a:rPr lang="en-US" dirty="0" smtClean="0"/>
-              <a:t>Framework</a:t>
+              <a:t>Agent Framework</a:t>
             </a:r>
             <a:endParaRPr lang="en-IN" dirty="0"/>
           </a:p>
@@ -3536,7 +3662,6 @@
               <a:rPr lang="en-IN" sz="1400" dirty="0"/>
               <a:t>       Reasoning      Tools        Data</a:t>
             </a:r>
-            <a:endParaRPr lang="en-IN" sz="1400" dirty="0"/>
           </a:p>
         </p:txBody>
       </p:sp>
@@ -3861,16 +3986,7 @@
                 </a:solidFill>
                 <a:latin typeface="source-serif-pro"/>
               </a:rPr>
-              <a:t>The Semantic Kernel SDK comes with some predefined connectors that can be grouped into two </a:t>
-            </a:r>
-            <a:r>
-              <a:rPr lang="en-US" dirty="0">
-                <a:solidFill>
-                  <a:srgbClr val="242424"/>
-                </a:solidFill>
-                <a:latin typeface="source-serif-pro"/>
-              </a:rPr>
-              <a:t>areas</a:t>
+              <a:t>The Semantic Kernel SDK comes with some predefined connectors that can be grouped into two areas</a:t>
             </a:r>
             <a:r>
               <a:rPr lang="en-US" dirty="0" smtClean="0">
@@ -4206,6 +4322,1189 @@
     <p:extLst>
       <p:ext uri="{BB962C8B-B14F-4D97-AF65-F5344CB8AC3E}">
         <p14:creationId xmlns:p14="http://schemas.microsoft.com/office/powerpoint/2010/main" val="2748975509"/>
+      </p:ext>
+    </p:extLst>
+  </p:cSld>
+  <p:clrMapOvr>
+    <a:masterClrMapping/>
+  </p:clrMapOvr>
+  <p:timing>
+    <p:tnLst>
+      <p:par>
+        <p:cTn id="1" dur="indefinite" restart="never" nodeType="tmRoot"/>
+      </p:par>
+    </p:tnLst>
+  </p:timing>
+</p:sld>
+</file>
+
+<file path=ppt/slides/slide5.xml><?xml version="1.0" encoding="utf-8"?>
+<p:sld xmlns:a="http://schemas.openxmlformats.org/drawingml/2006/main" xmlns:r="http://schemas.openxmlformats.org/officeDocument/2006/relationships" xmlns:p="http://schemas.openxmlformats.org/presentationml/2006/main">
+  <p:cSld>
+    <p:spTree>
+      <p:nvGrpSpPr>
+        <p:cNvPr id="1" name=""/>
+        <p:cNvGrpSpPr/>
+        <p:nvPr/>
+      </p:nvGrpSpPr>
+      <p:grpSpPr>
+        <a:xfrm>
+          <a:off x="0" y="0"/>
+          <a:ext cx="0" cy="0"/>
+          <a:chOff x="0" y="0"/>
+          <a:chExt cx="0" cy="0"/>
+        </a:xfrm>
+      </p:grpSpPr>
+      <p:sp>
+        <p:nvSpPr>
+          <p:cNvPr id="2" name="Title 1"/>
+          <p:cNvSpPr>
+            <a:spLocks noGrp="1"/>
+          </p:cNvSpPr>
+          <p:nvPr>
+            <p:ph type="title"/>
+          </p:nvPr>
+        </p:nvSpPr>
+        <p:spPr/>
+        <p:txBody>
+          <a:bodyPr/>
+          <a:lstStyle/>
+          <a:p>
+            <a:r>
+              <a:rPr lang="en-US" dirty="0" err="1" smtClean="0"/>
+              <a:t>Sementic</a:t>
+            </a:r>
+            <a:r>
+              <a:rPr lang="en-US" dirty="0" smtClean="0"/>
+              <a:t> </a:t>
+            </a:r>
+            <a:r>
+              <a:rPr lang="en-US" dirty="0" err="1" smtClean="0"/>
+              <a:t>Kernal</a:t>
+            </a:r>
+            <a:endParaRPr lang="en-IN" dirty="0"/>
+          </a:p>
+        </p:txBody>
+      </p:sp>
+      <p:sp>
+        <p:nvSpPr>
+          <p:cNvPr id="3" name="Content Placeholder 2"/>
+          <p:cNvSpPr>
+            <a:spLocks noGrp="1"/>
+          </p:cNvSpPr>
+          <p:nvPr>
+            <p:ph idx="1"/>
+          </p:nvPr>
+        </p:nvSpPr>
+        <p:spPr/>
+        <p:txBody>
+          <a:bodyPr/>
+          <a:lstStyle/>
+          <a:p>
+            <a:r>
+              <a:rPr lang="en-US" dirty="0"/>
+              <a:t>What it is?</a:t>
+            </a:r>
+          </a:p>
+          <a:p>
+            <a:r>
+              <a:rPr lang="en-US" dirty="0"/>
+              <a:t>The Kernel is the central orchestrator in Semantic Kernel. Think of it as the </a:t>
+            </a:r>
+            <a:r>
+              <a:rPr lang="en-US" dirty="0" err="1"/>
+              <a:t>IServiceProvider</a:t>
+            </a:r>
+            <a:r>
+              <a:rPr lang="en-US" dirty="0"/>
+              <a:t> of the AI world — it holds references to AI service connectors, plugins, and configuration.</a:t>
+            </a:r>
+            <a:endParaRPr lang="en-IN" dirty="0"/>
+          </a:p>
+        </p:txBody>
+      </p:sp>
+    </p:spTree>
+    <p:extLst>
+      <p:ext uri="{BB962C8B-B14F-4D97-AF65-F5344CB8AC3E}">
+        <p14:creationId xmlns:p14="http://schemas.microsoft.com/office/powerpoint/2010/main" val="993295366"/>
+      </p:ext>
+    </p:extLst>
+  </p:cSld>
+  <p:clrMapOvr>
+    <a:masterClrMapping/>
+  </p:clrMapOvr>
+  <p:timing>
+    <p:tnLst>
+      <p:par>
+        <p:cTn id="1" dur="indefinite" restart="never" nodeType="tmRoot"/>
+      </p:par>
+    </p:tnLst>
+  </p:timing>
+</p:sld>
+</file>
+
+<file path=ppt/slides/slide6.xml><?xml version="1.0" encoding="utf-8"?>
+<p:sld xmlns:a="http://schemas.openxmlformats.org/drawingml/2006/main" xmlns:r="http://schemas.openxmlformats.org/officeDocument/2006/relationships" xmlns:p="http://schemas.openxmlformats.org/presentationml/2006/main">
+  <p:cSld>
+    <p:spTree>
+      <p:nvGrpSpPr>
+        <p:cNvPr id="1" name=""/>
+        <p:cNvGrpSpPr/>
+        <p:nvPr/>
+      </p:nvGrpSpPr>
+      <p:grpSpPr>
+        <a:xfrm>
+          <a:off x="0" y="0"/>
+          <a:ext cx="0" cy="0"/>
+          <a:chOff x="0" y="0"/>
+          <a:chExt cx="0" cy="0"/>
+        </a:xfrm>
+      </p:grpSpPr>
+      <p:sp>
+        <p:nvSpPr>
+          <p:cNvPr id="2" name="Title 1"/>
+          <p:cNvSpPr>
+            <a:spLocks noGrp="1"/>
+          </p:cNvSpPr>
+          <p:nvPr>
+            <p:ph type="title"/>
+          </p:nvPr>
+        </p:nvSpPr>
+        <p:spPr>
+          <a:xfrm>
+            <a:off x="838200" y="134389"/>
+            <a:ext cx="10515600" cy="429633"/>
+          </a:xfrm>
+        </p:spPr>
+        <p:txBody>
+          <a:bodyPr>
+            <a:normAutofit fontScale="90000"/>
+          </a:bodyPr>
+          <a:lstStyle/>
+          <a:p>
+            <a:r>
+              <a:rPr lang="en-US" dirty="0" err="1" smtClean="0"/>
+              <a:t>Sementic</a:t>
+            </a:r>
+            <a:r>
+              <a:rPr lang="en-US" dirty="0" smtClean="0"/>
+              <a:t> </a:t>
+            </a:r>
+            <a:r>
+              <a:rPr lang="en-US" dirty="0" err="1" smtClean="0"/>
+              <a:t>Kernal</a:t>
+            </a:r>
+            <a:r>
+              <a:rPr lang="en-US" dirty="0" smtClean="0"/>
+              <a:t> – AI service Layer</a:t>
+            </a:r>
+            <a:endParaRPr lang="en-IN" dirty="0"/>
+          </a:p>
+        </p:txBody>
+      </p:sp>
+      <p:sp>
+        <p:nvSpPr>
+          <p:cNvPr id="3" name="Content Placeholder 2"/>
+          <p:cNvSpPr>
+            <a:spLocks noGrp="1"/>
+          </p:cNvSpPr>
+          <p:nvPr>
+            <p:ph idx="1"/>
+          </p:nvPr>
+        </p:nvSpPr>
+        <p:spPr>
+          <a:xfrm>
+            <a:off x="838200" y="800129"/>
+            <a:ext cx="10515600" cy="5882681"/>
+          </a:xfrm>
+        </p:spPr>
+        <p:txBody>
+          <a:bodyPr>
+            <a:normAutofit/>
+          </a:bodyPr>
+          <a:lstStyle/>
+          <a:p>
+            <a:r>
+              <a:rPr lang="en-US" b="1" dirty="0"/>
+              <a:t>AI Services Layer</a:t>
+            </a:r>
+            <a:r>
+              <a:rPr lang="en-US" dirty="0"/>
+              <a:t> — connectors to Azure </a:t>
+            </a:r>
+            <a:r>
+              <a:rPr lang="en-US" dirty="0" err="1"/>
+              <a:t>OpenAI</a:t>
+            </a:r>
+            <a:r>
+              <a:rPr lang="en-US" dirty="0"/>
+              <a:t>, </a:t>
+            </a:r>
+            <a:r>
+              <a:rPr lang="en-US" dirty="0" err="1"/>
+              <a:t>OpenAI</a:t>
+            </a:r>
+            <a:r>
+              <a:rPr lang="en-US" dirty="0"/>
+              <a:t>, local models</a:t>
+            </a:r>
+          </a:p>
+          <a:p>
+            <a:pPr marL="0" indent="0">
+              <a:buNone/>
+            </a:pPr>
+            <a:r>
+              <a:rPr lang="en-IN" sz="1900" dirty="0"/>
+              <a:t/>
+            </a:r>
+            <a:br>
+              <a:rPr lang="en-IN" sz="1900" dirty="0"/>
+            </a:br>
+            <a:r>
+              <a:rPr lang="en-IN" sz="1900" dirty="0" err="1" smtClean="0"/>
+              <a:t>var</a:t>
+            </a:r>
+            <a:r>
+              <a:rPr lang="en-IN" sz="1900" dirty="0" smtClean="0"/>
+              <a:t> </a:t>
+            </a:r>
+            <a:r>
+              <a:rPr lang="en-IN" sz="1900" dirty="0"/>
+              <a:t>builder = </a:t>
+            </a:r>
+            <a:r>
+              <a:rPr lang="en-IN" sz="1900" dirty="0" err="1"/>
+              <a:t>Kernel.CreateBuilder</a:t>
+            </a:r>
+            <a:r>
+              <a:rPr lang="en-IN" sz="1900" dirty="0"/>
+              <a:t>();</a:t>
+            </a:r>
+            <a:r>
+              <a:rPr lang="en-IN" sz="1900" dirty="0"/>
+              <a:t/>
+            </a:r>
+            <a:br>
+              <a:rPr lang="en-IN" sz="1900" dirty="0"/>
+            </a:br>
+            <a:r>
+              <a:rPr lang="en-IN" sz="1900" dirty="0"/>
+              <a:t/>
+            </a:r>
+            <a:br>
+              <a:rPr lang="en-IN" sz="1900" dirty="0"/>
+            </a:br>
+            <a:r>
+              <a:rPr lang="en-IN" sz="1900" dirty="0" err="1"/>
+              <a:t>builder.AddAzureOpenAIChatCompletion</a:t>
+            </a:r>
+            <a:r>
+              <a:rPr lang="en-IN" sz="1900" dirty="0"/>
+              <a:t>(</a:t>
+            </a:r>
+            <a:r>
+              <a:rPr lang="en-IN" sz="1900" dirty="0"/>
+              <a:t/>
+            </a:r>
+            <a:br>
+              <a:rPr lang="en-IN" sz="1900" dirty="0"/>
+            </a:br>
+            <a:r>
+              <a:rPr lang="en-IN" sz="1900" dirty="0" err="1"/>
+              <a:t>deploymentName</a:t>
+            </a:r>
+            <a:r>
+              <a:rPr lang="en-IN" sz="1900" dirty="0"/>
+              <a:t>: </a:t>
+            </a:r>
+            <a:r>
+              <a:rPr lang="en-IN" sz="1900" dirty="0" err="1"/>
+              <a:t>Environment.GetEnvironmentVariable</a:t>
+            </a:r>
+            <a:r>
+              <a:rPr lang="en-IN" sz="1900" dirty="0"/>
+              <a:t>("AZURE_OPENAI_DEPLOYMENT")!,</a:t>
+            </a:r>
+            <a:r>
+              <a:rPr lang="en-IN" sz="1900" dirty="0"/>
+              <a:t/>
+            </a:r>
+            <a:br>
+              <a:rPr lang="en-IN" sz="1900" dirty="0"/>
+            </a:br>
+            <a:r>
+              <a:rPr lang="en-IN" sz="1900" dirty="0"/>
+              <a:t>endpoint: </a:t>
+            </a:r>
+            <a:r>
+              <a:rPr lang="en-IN" sz="1900" dirty="0" err="1"/>
+              <a:t>Environment.GetEnvironmentVariable</a:t>
+            </a:r>
+            <a:r>
+              <a:rPr lang="en-IN" sz="1900" dirty="0"/>
+              <a:t>("AZURE_OPENAI_ENDPOINT")!,</a:t>
+            </a:r>
+            <a:r>
+              <a:rPr lang="en-IN" sz="1900" dirty="0"/>
+              <a:t/>
+            </a:r>
+            <a:br>
+              <a:rPr lang="en-IN" sz="1900" dirty="0"/>
+            </a:br>
+            <a:r>
+              <a:rPr lang="en-IN" sz="1900" dirty="0" err="1"/>
+              <a:t>apiKey</a:t>
+            </a:r>
+            <a:r>
+              <a:rPr lang="en-IN" sz="1900" dirty="0"/>
+              <a:t>: </a:t>
+            </a:r>
+            <a:r>
+              <a:rPr lang="en-IN" sz="1900" dirty="0" err="1"/>
+              <a:t>Environment.GetEnvironmentVariable</a:t>
+            </a:r>
+            <a:r>
+              <a:rPr lang="en-IN" sz="1900" dirty="0"/>
+              <a:t>("AZURE_OPENAI_KEY")!</a:t>
+            </a:r>
+            <a:r>
+              <a:rPr lang="en-IN" sz="1900" dirty="0"/>
+              <a:t/>
+            </a:r>
+            <a:br>
+              <a:rPr lang="en-IN" sz="1900" dirty="0"/>
+            </a:br>
+            <a:r>
+              <a:rPr lang="en-IN" sz="1900" dirty="0"/>
+              <a:t>);</a:t>
+            </a:r>
+            <a:r>
+              <a:rPr lang="en-IN" sz="1900" dirty="0"/>
+              <a:t/>
+            </a:r>
+            <a:br>
+              <a:rPr lang="en-IN" sz="1900" dirty="0"/>
+            </a:br>
+            <a:r>
+              <a:rPr lang="en-IN" sz="1900" dirty="0"/>
+              <a:t/>
+            </a:r>
+            <a:br>
+              <a:rPr lang="en-IN" sz="1900" dirty="0"/>
+            </a:br>
+            <a:r>
+              <a:rPr lang="en-IN" sz="1900" dirty="0"/>
+              <a:t>// Kernel is immutable after this call</a:t>
+            </a:r>
+            <a:r>
+              <a:rPr lang="en-IN" sz="1900" dirty="0"/>
+              <a:t/>
+            </a:r>
+            <a:br>
+              <a:rPr lang="en-IN" sz="1900" dirty="0"/>
+            </a:br>
+            <a:r>
+              <a:rPr lang="en-IN" sz="1900" dirty="0"/>
+              <a:t>Kernel </a:t>
+            </a:r>
+            <a:r>
+              <a:rPr lang="en-IN" sz="1900" dirty="0" err="1"/>
+              <a:t>kernel</a:t>
+            </a:r>
+            <a:r>
+              <a:rPr lang="en-IN" sz="1900" dirty="0"/>
+              <a:t> = </a:t>
+            </a:r>
+            <a:r>
+              <a:rPr lang="en-IN" sz="1900" dirty="0" err="1"/>
+              <a:t>builder.Build</a:t>
+            </a:r>
+            <a:r>
+              <a:rPr lang="en-IN" sz="1900" dirty="0" smtClean="0"/>
+              <a:t>();</a:t>
+            </a:r>
+          </a:p>
+          <a:p>
+            <a:pPr marL="0" indent="0">
+              <a:buNone/>
+            </a:pPr>
+            <a:endParaRPr lang="en-US" sz="1900" dirty="0"/>
+          </a:p>
+          <a:p>
+            <a:pPr lvl="0" eaLnBrk="0" fontAlgn="base" hangingPunct="0">
+              <a:spcBef>
+                <a:spcPct val="0"/>
+              </a:spcBef>
+              <a:spcAft>
+                <a:spcPct val="0"/>
+              </a:spcAft>
+            </a:pPr>
+            <a:r>
+              <a:rPr lang="en-US" sz="2000" b="1" dirty="0">
+                <a:solidFill>
+                  <a:srgbClr val="242424"/>
+                </a:solidFill>
+                <a:latin typeface="source-serif-pro"/>
+              </a:rPr>
+              <a:t>Integration with AI models:</a:t>
+            </a:r>
+          </a:p>
+          <a:p>
+            <a:pPr lvl="0" eaLnBrk="0" fontAlgn="base" hangingPunct="0">
+              <a:spcBef>
+                <a:spcPct val="0"/>
+              </a:spcBef>
+              <a:spcAft>
+                <a:spcPct val="0"/>
+              </a:spcAft>
+              <a:buFontTx/>
+              <a:buChar char="•"/>
+            </a:pPr>
+            <a:r>
+              <a:rPr lang="en-US" sz="2000" dirty="0" err="1">
+                <a:solidFill>
+                  <a:srgbClr val="242424"/>
+                </a:solidFill>
+                <a:latin typeface="source-serif-pro"/>
+              </a:rPr>
+              <a:t>HuggingFace</a:t>
+            </a:r>
+            <a:r>
+              <a:rPr lang="en-US" sz="2000" dirty="0">
+                <a:solidFill>
+                  <a:srgbClr val="242424"/>
+                </a:solidFill>
+                <a:latin typeface="source-serif-pro"/>
+              </a:rPr>
+              <a:t> </a:t>
+            </a:r>
+            <a:r>
+              <a:rPr lang="en-US" sz="2000" dirty="0" err="1">
+                <a:solidFill>
+                  <a:srgbClr val="242424"/>
+                </a:solidFill>
+                <a:latin typeface="source-serif-pro"/>
+              </a:rPr>
+              <a:t>Microsoft.SemanticKernel.Connectors.AI.HuggingFace</a:t>
+            </a:r>
+            <a:endParaRPr lang="en-US" sz="2000" dirty="0">
+              <a:solidFill>
+                <a:srgbClr val="242424"/>
+              </a:solidFill>
+              <a:latin typeface="source-serif-pro"/>
+            </a:endParaRPr>
+          </a:p>
+          <a:p>
+            <a:pPr lvl="0" eaLnBrk="0" fontAlgn="base" hangingPunct="0">
+              <a:spcBef>
+                <a:spcPct val="0"/>
+              </a:spcBef>
+              <a:spcAft>
+                <a:spcPct val="0"/>
+              </a:spcAft>
+              <a:buFontTx/>
+              <a:buChar char="•"/>
+            </a:pPr>
+            <a:r>
+              <a:rPr lang="en-US" sz="2000" dirty="0" err="1">
+                <a:solidFill>
+                  <a:srgbClr val="242424"/>
+                </a:solidFill>
+                <a:latin typeface="source-serif-pro"/>
+              </a:rPr>
+              <a:t>Oobabooga</a:t>
+            </a:r>
+            <a:r>
+              <a:rPr lang="en-US" sz="2000" dirty="0">
+                <a:solidFill>
+                  <a:srgbClr val="242424"/>
+                </a:solidFill>
+                <a:latin typeface="source-serif-pro"/>
+              </a:rPr>
+              <a:t> </a:t>
+            </a:r>
+            <a:r>
+              <a:rPr lang="en-US" sz="2000" dirty="0" err="1">
+                <a:solidFill>
+                  <a:srgbClr val="242424"/>
+                </a:solidFill>
+                <a:latin typeface="source-serif-pro"/>
+              </a:rPr>
+              <a:t>Microsoft.SemanticKernel.Connectors.AI.Oobabooga</a:t>
+            </a:r>
+            <a:endParaRPr lang="en-US" sz="2000" dirty="0">
+              <a:solidFill>
+                <a:srgbClr val="242424"/>
+              </a:solidFill>
+              <a:latin typeface="source-serif-pro"/>
+            </a:endParaRPr>
+          </a:p>
+          <a:p>
+            <a:pPr lvl="0" eaLnBrk="0" fontAlgn="base" hangingPunct="0">
+              <a:spcBef>
+                <a:spcPct val="0"/>
+              </a:spcBef>
+              <a:spcAft>
+                <a:spcPct val="0"/>
+              </a:spcAft>
+              <a:buFontTx/>
+              <a:buChar char="•"/>
+            </a:pPr>
+            <a:r>
+              <a:rPr lang="en-US" sz="2000" dirty="0" err="1">
+                <a:solidFill>
+                  <a:srgbClr val="242424"/>
+                </a:solidFill>
+                <a:latin typeface="source-serif-pro"/>
+              </a:rPr>
+              <a:t>OpenAI</a:t>
+            </a:r>
+            <a:r>
+              <a:rPr lang="en-US" sz="2000" dirty="0">
+                <a:solidFill>
+                  <a:srgbClr val="242424"/>
+                </a:solidFill>
+                <a:latin typeface="source-serif-pro"/>
+              </a:rPr>
+              <a:t> </a:t>
+            </a:r>
+            <a:r>
+              <a:rPr lang="en-US" sz="2000" dirty="0" err="1">
+                <a:solidFill>
+                  <a:srgbClr val="242424"/>
+                </a:solidFill>
+                <a:latin typeface="source-serif-pro"/>
+              </a:rPr>
+              <a:t>Microsoft.SemanticKernel.Connectors.AO.OpenAI</a:t>
+            </a:r>
+            <a:endParaRPr lang="en-US" sz="2000" dirty="0">
+              <a:solidFill>
+                <a:srgbClr val="242424"/>
+              </a:solidFill>
+              <a:latin typeface="source-serif-pro"/>
+            </a:endParaRPr>
+          </a:p>
+          <a:p>
+            <a:pPr marL="0" indent="0">
+              <a:buNone/>
+            </a:pPr>
+            <a:endParaRPr lang="en-IN" sz="1900" dirty="0"/>
+          </a:p>
+        </p:txBody>
+      </p:sp>
+    </p:spTree>
+    <p:extLst>
+      <p:ext uri="{BB962C8B-B14F-4D97-AF65-F5344CB8AC3E}">
+        <p14:creationId xmlns:p14="http://schemas.microsoft.com/office/powerpoint/2010/main" val="3816808110"/>
+      </p:ext>
+    </p:extLst>
+  </p:cSld>
+  <p:clrMapOvr>
+    <a:masterClrMapping/>
+  </p:clrMapOvr>
+</p:sld>
+</file>
+
+<file path=ppt/slides/slide7.xml><?xml version="1.0" encoding="utf-8"?>
+<p:sld xmlns:a="http://schemas.openxmlformats.org/drawingml/2006/main" xmlns:r="http://schemas.openxmlformats.org/officeDocument/2006/relationships" xmlns:p="http://schemas.openxmlformats.org/presentationml/2006/main">
+  <p:cSld>
+    <p:spTree>
+      <p:nvGrpSpPr>
+        <p:cNvPr id="1" name=""/>
+        <p:cNvGrpSpPr/>
+        <p:nvPr/>
+      </p:nvGrpSpPr>
+      <p:grpSpPr>
+        <a:xfrm>
+          <a:off x="0" y="0"/>
+          <a:ext cx="0" cy="0"/>
+          <a:chOff x="0" y="0"/>
+          <a:chExt cx="0" cy="0"/>
+        </a:xfrm>
+      </p:grpSpPr>
+      <p:sp>
+        <p:nvSpPr>
+          <p:cNvPr id="2" name="Title 1"/>
+          <p:cNvSpPr>
+            <a:spLocks noGrp="1"/>
+          </p:cNvSpPr>
+          <p:nvPr>
+            <p:ph type="title"/>
+          </p:nvPr>
+        </p:nvSpPr>
+        <p:spPr/>
+        <p:txBody>
+          <a:bodyPr/>
+          <a:lstStyle/>
+          <a:p>
+            <a:r>
+              <a:rPr lang="en-US" dirty="0" err="1"/>
+              <a:t>Sementic</a:t>
+            </a:r>
+            <a:r>
+              <a:rPr lang="en-US" dirty="0"/>
+              <a:t> </a:t>
+            </a:r>
+            <a:r>
+              <a:rPr lang="en-US" dirty="0" err="1"/>
+              <a:t>Kernal</a:t>
+            </a:r>
+            <a:r>
+              <a:rPr lang="en-US" dirty="0"/>
+              <a:t> – </a:t>
+            </a:r>
+            <a:r>
+              <a:rPr lang="en-US" dirty="0" smtClean="0"/>
+              <a:t>Plugin Layer (</a:t>
+            </a:r>
+            <a:r>
+              <a:rPr lang="en-US" dirty="0" err="1" smtClean="0"/>
+              <a:t>Kernal</a:t>
+            </a:r>
+            <a:r>
+              <a:rPr lang="en-US" dirty="0" smtClean="0"/>
+              <a:t> Functions)</a:t>
+            </a:r>
+            <a:endParaRPr lang="en-IN" dirty="0"/>
+          </a:p>
+        </p:txBody>
+      </p:sp>
+      <p:sp>
+        <p:nvSpPr>
+          <p:cNvPr id="3" name="Content Placeholder 2"/>
+          <p:cNvSpPr>
+            <a:spLocks noGrp="1"/>
+          </p:cNvSpPr>
+          <p:nvPr>
+            <p:ph idx="1"/>
+          </p:nvPr>
+        </p:nvSpPr>
+        <p:spPr/>
+        <p:txBody>
+          <a:bodyPr>
+            <a:normAutofit/>
+          </a:bodyPr>
+          <a:lstStyle/>
+          <a:p>
+            <a:r>
+              <a:rPr lang="en-US" dirty="0"/>
+              <a:t>Y</a:t>
+            </a:r>
+            <a:r>
+              <a:rPr lang="en-US" dirty="0" smtClean="0"/>
+              <a:t>our </a:t>
+            </a:r>
+            <a:r>
+              <a:rPr lang="en-US" dirty="0"/>
+              <a:t>business logic exposed as </a:t>
+            </a:r>
+            <a:r>
+              <a:rPr lang="en-US" dirty="0" smtClean="0"/>
+              <a:t>tools</a:t>
+            </a:r>
+          </a:p>
+          <a:p>
+            <a:endParaRPr lang="en-US" dirty="0" smtClean="0"/>
+          </a:p>
+          <a:p>
+            <a:pPr marL="0" indent="0">
+              <a:buNone/>
+            </a:pPr>
+            <a:r>
+              <a:rPr lang="en-IN" sz="1600" dirty="0"/>
+              <a:t>[</a:t>
+            </a:r>
+            <a:r>
+              <a:rPr lang="en-IN" sz="1600" dirty="0" err="1"/>
+              <a:t>KernelFunction</a:t>
+            </a:r>
+            <a:r>
+              <a:rPr lang="en-IN" sz="1600" dirty="0"/>
+              <a:t>]</a:t>
+            </a:r>
+          </a:p>
+          <a:p>
+            <a:pPr marL="0" indent="0">
+              <a:buNone/>
+            </a:pPr>
+            <a:r>
+              <a:rPr lang="en-IN" sz="1600" dirty="0"/>
+              <a:t>[Description("Get manager information for an employee")]</a:t>
+            </a:r>
+          </a:p>
+          <a:p>
+            <a:pPr marL="0" indent="0">
+              <a:buNone/>
+            </a:pPr>
+            <a:r>
+              <a:rPr lang="en-IN" sz="1600" dirty="0"/>
+              <a:t>public string </a:t>
+            </a:r>
+            <a:r>
+              <a:rPr lang="en-IN" sz="1600" dirty="0" err="1"/>
+              <a:t>GetManagerDetails</a:t>
+            </a:r>
+            <a:r>
+              <a:rPr lang="en-IN" sz="1600" dirty="0"/>
+              <a:t>( [Description("Employee ID")] </a:t>
+            </a:r>
+            <a:r>
+              <a:rPr lang="en-IN" sz="1600" dirty="0" err="1"/>
+              <a:t>int</a:t>
+            </a:r>
+            <a:r>
+              <a:rPr lang="en-IN" sz="1600" dirty="0"/>
+              <a:t> </a:t>
+            </a:r>
+            <a:r>
+              <a:rPr lang="en-IN" sz="1600" dirty="0" err="1"/>
+              <a:t>employeeId</a:t>
+            </a:r>
+            <a:r>
+              <a:rPr lang="en-IN" sz="1600" dirty="0"/>
+              <a:t>)</a:t>
+            </a:r>
+          </a:p>
+          <a:p>
+            <a:pPr marL="0" indent="0">
+              <a:buNone/>
+            </a:pPr>
+            <a:r>
+              <a:rPr lang="en-IN" sz="1600" dirty="0"/>
+              <a:t>{</a:t>
+            </a:r>
+          </a:p>
+          <a:p>
+            <a:pPr marL="0" indent="0">
+              <a:buNone/>
+            </a:pPr>
+            <a:r>
+              <a:rPr lang="en-IN" sz="1600" dirty="0"/>
+              <a:t>    </a:t>
+            </a:r>
+            <a:r>
+              <a:rPr lang="en-IN" sz="1600" dirty="0" err="1"/>
+              <a:t>Console.WriteLine</a:t>
+            </a:r>
+            <a:r>
+              <a:rPr lang="en-IN" sz="1600" dirty="0"/>
+              <a:t>($"TOOL: </a:t>
+            </a:r>
+            <a:r>
+              <a:rPr lang="en-IN" sz="1600" dirty="0" err="1"/>
+              <a:t>GetManagerDetails</a:t>
+            </a:r>
+            <a:r>
+              <a:rPr lang="en-IN" sz="1600" dirty="0"/>
+              <a:t>({</a:t>
+            </a:r>
+            <a:r>
+              <a:rPr lang="en-IN" sz="1600" dirty="0" err="1"/>
+              <a:t>employeeId</a:t>
+            </a:r>
+            <a:r>
+              <a:rPr lang="en-IN" sz="1600" dirty="0"/>
+              <a:t>})");</a:t>
+            </a:r>
+          </a:p>
+          <a:p>
+            <a:pPr marL="0" indent="0">
+              <a:buNone/>
+            </a:pPr>
+            <a:r>
+              <a:rPr lang="en-IN" sz="1600" dirty="0" smtClean="0"/>
+              <a:t>    </a:t>
+            </a:r>
+            <a:endParaRPr lang="en-IN" sz="1600" dirty="0"/>
+          </a:p>
+          <a:p>
+            <a:pPr marL="0" indent="0">
+              <a:buNone/>
+            </a:pPr>
+            <a:r>
+              <a:rPr lang="en-IN" sz="1600" dirty="0" smtClean="0"/>
+              <a:t>}</a:t>
+            </a:r>
+            <a:endParaRPr lang="en-IN" sz="1600" dirty="0"/>
+          </a:p>
+          <a:p>
+            <a:pPr marL="0" indent="0">
+              <a:buNone/>
+            </a:pPr>
+            <a:r>
+              <a:rPr lang="en-IN" sz="1600" dirty="0"/>
+              <a:t>}</a:t>
+            </a:r>
+          </a:p>
+        </p:txBody>
+      </p:sp>
+    </p:spTree>
+    <p:extLst>
+      <p:ext uri="{BB962C8B-B14F-4D97-AF65-F5344CB8AC3E}">
+        <p14:creationId xmlns:p14="http://schemas.microsoft.com/office/powerpoint/2010/main" val="3233222254"/>
+      </p:ext>
+    </p:extLst>
+  </p:cSld>
+  <p:clrMapOvr>
+    <a:masterClrMapping/>
+  </p:clrMapOvr>
+</p:sld>
+</file>
+
+<file path=ppt/slides/slide8.xml><?xml version="1.0" encoding="utf-8"?>
+<p:sld xmlns:a="http://schemas.openxmlformats.org/drawingml/2006/main" xmlns:r="http://schemas.openxmlformats.org/officeDocument/2006/relationships" xmlns:p="http://schemas.openxmlformats.org/presentationml/2006/main">
+  <p:cSld>
+    <p:spTree>
+      <p:nvGrpSpPr>
+        <p:cNvPr id="1" name=""/>
+        <p:cNvGrpSpPr/>
+        <p:nvPr/>
+      </p:nvGrpSpPr>
+      <p:grpSpPr>
+        <a:xfrm>
+          <a:off x="0" y="0"/>
+          <a:ext cx="0" cy="0"/>
+          <a:chOff x="0" y="0"/>
+          <a:chExt cx="0" cy="0"/>
+        </a:xfrm>
+      </p:grpSpPr>
+      <p:sp>
+        <p:nvSpPr>
+          <p:cNvPr id="2" name="Title 1"/>
+          <p:cNvSpPr>
+            <a:spLocks noGrp="1"/>
+          </p:cNvSpPr>
+          <p:nvPr>
+            <p:ph type="title"/>
+          </p:nvPr>
+        </p:nvSpPr>
+        <p:spPr/>
+        <p:txBody>
+          <a:bodyPr/>
+          <a:lstStyle/>
+          <a:p>
+            <a:r>
+              <a:rPr lang="en-US" dirty="0" smtClean="0"/>
+              <a:t>Automatic Function Call</a:t>
+            </a:r>
+            <a:endParaRPr lang="en-IN" dirty="0"/>
+          </a:p>
+        </p:txBody>
+      </p:sp>
+      <p:sp>
+        <p:nvSpPr>
+          <p:cNvPr id="3" name="Content Placeholder 2"/>
+          <p:cNvSpPr>
+            <a:spLocks noGrp="1"/>
+          </p:cNvSpPr>
+          <p:nvPr>
+            <p:ph idx="1"/>
+          </p:nvPr>
+        </p:nvSpPr>
+        <p:spPr/>
+        <p:txBody>
+          <a:bodyPr/>
+          <a:lstStyle/>
+          <a:p>
+            <a:r>
+              <a:rPr lang="en-US" dirty="0" smtClean="0"/>
+              <a:t>Using </a:t>
+            </a:r>
+            <a:r>
+              <a:rPr lang="en-US" dirty="0" err="1" smtClean="0"/>
+              <a:t>Sementic</a:t>
+            </a:r>
+            <a:r>
+              <a:rPr lang="en-US" dirty="0" smtClean="0"/>
+              <a:t> </a:t>
+            </a:r>
+            <a:r>
+              <a:rPr lang="en-US" dirty="0" err="1" smtClean="0"/>
+              <a:t>Kernal</a:t>
+            </a:r>
+            <a:r>
+              <a:rPr lang="en-US" dirty="0" smtClean="0"/>
+              <a:t> , we do not need to worry about calling Tools.</a:t>
+            </a:r>
+          </a:p>
+          <a:p>
+            <a:r>
+              <a:rPr lang="en-US" dirty="0" smtClean="0"/>
+              <a:t>Framework take care all those things via auto function settings</a:t>
+            </a:r>
+          </a:p>
+          <a:p>
+            <a:endParaRPr lang="en-US" dirty="0"/>
+          </a:p>
+          <a:p>
+            <a:pPr marL="0" indent="0">
+              <a:buNone/>
+            </a:pPr>
+            <a:r>
+              <a:rPr lang="en-IN" sz="1800" dirty="0"/>
+              <a:t> </a:t>
+            </a:r>
+            <a:r>
+              <a:rPr lang="en-IN" sz="1800" dirty="0" err="1"/>
+              <a:t>var</a:t>
+            </a:r>
+            <a:r>
+              <a:rPr lang="en-IN" sz="1800" dirty="0"/>
+              <a:t> settings = new </a:t>
+            </a:r>
+            <a:r>
+              <a:rPr lang="en-IN" sz="1800" dirty="0" err="1"/>
+              <a:t>OpenAIPromptExecutionSettings</a:t>
+            </a:r>
+            <a:endParaRPr lang="en-IN" sz="1800" dirty="0"/>
+          </a:p>
+          <a:p>
+            <a:pPr marL="0" indent="0">
+              <a:buNone/>
+            </a:pPr>
+            <a:r>
+              <a:rPr lang="en-IN" sz="1800" dirty="0"/>
+              <a:t> {</a:t>
+            </a:r>
+          </a:p>
+          <a:p>
+            <a:pPr marL="0" indent="0">
+              <a:buNone/>
+            </a:pPr>
+            <a:r>
+              <a:rPr lang="en-IN" sz="1800" dirty="0"/>
+              <a:t>     </a:t>
+            </a:r>
+            <a:r>
+              <a:rPr lang="en-IN" sz="1800" dirty="0" err="1"/>
+              <a:t>FunctionChoiceBehavior</a:t>
+            </a:r>
+            <a:r>
+              <a:rPr lang="en-IN" sz="1800" dirty="0"/>
+              <a:t> =  </a:t>
+            </a:r>
+            <a:r>
+              <a:rPr lang="en-IN" sz="1800" dirty="0" err="1"/>
+              <a:t>FunctionChoiceBehavior.Auto</a:t>
+            </a:r>
+            <a:r>
+              <a:rPr lang="en-IN" sz="1800" dirty="0"/>
+              <a:t>()</a:t>
+            </a:r>
+          </a:p>
+          <a:p>
+            <a:pPr marL="0" indent="0">
+              <a:buNone/>
+            </a:pPr>
+            <a:r>
+              <a:rPr lang="en-IN" sz="1800" dirty="0"/>
+              <a:t> };</a:t>
+            </a:r>
+            <a:endParaRPr lang="en-IN" sz="1800" dirty="0"/>
+          </a:p>
+        </p:txBody>
+      </p:sp>
+    </p:spTree>
+    <p:extLst>
+      <p:ext uri="{BB962C8B-B14F-4D97-AF65-F5344CB8AC3E}">
+        <p14:creationId xmlns:p14="http://schemas.microsoft.com/office/powerpoint/2010/main" val="3760046323"/>
+      </p:ext>
+    </p:extLst>
+  </p:cSld>
+  <p:clrMapOvr>
+    <a:masterClrMapping/>
+  </p:clrMapOvr>
+</p:sld>
+</file>
+
+<file path=ppt/slides/slide9.xml><?xml version="1.0" encoding="utf-8"?>
+<p:sld xmlns:a="http://schemas.openxmlformats.org/drawingml/2006/main" xmlns:r="http://schemas.openxmlformats.org/officeDocument/2006/relationships" xmlns:p="http://schemas.openxmlformats.org/presentationml/2006/main">
+  <p:cSld>
+    <p:spTree>
+      <p:nvGrpSpPr>
+        <p:cNvPr id="1" name=""/>
+        <p:cNvGrpSpPr/>
+        <p:nvPr/>
+      </p:nvGrpSpPr>
+      <p:grpSpPr>
+        <a:xfrm>
+          <a:off x="0" y="0"/>
+          <a:ext cx="0" cy="0"/>
+          <a:chOff x="0" y="0"/>
+          <a:chExt cx="0" cy="0"/>
+        </a:xfrm>
+      </p:grpSpPr>
+      <p:sp>
+        <p:nvSpPr>
+          <p:cNvPr id="2" name="Title 1"/>
+          <p:cNvSpPr>
+            <a:spLocks noGrp="1"/>
+          </p:cNvSpPr>
+          <p:nvPr>
+            <p:ph type="title"/>
+          </p:nvPr>
+        </p:nvSpPr>
+        <p:spPr>
+          <a:xfrm>
+            <a:off x="504914" y="74569"/>
+            <a:ext cx="10515600" cy="592004"/>
+          </a:xfrm>
+        </p:spPr>
+        <p:txBody>
+          <a:bodyPr>
+            <a:normAutofit fontScale="90000"/>
+          </a:bodyPr>
+          <a:lstStyle/>
+          <a:p>
+            <a:r>
+              <a:rPr lang="en-US" dirty="0" smtClean="0"/>
+              <a:t>Invoke Function – </a:t>
+            </a:r>
+            <a:r>
+              <a:rPr lang="en-US" dirty="0" err="1" smtClean="0"/>
+              <a:t>Chatcompletion</a:t>
+            </a:r>
+            <a:endParaRPr lang="en-IN" dirty="0"/>
+          </a:p>
+        </p:txBody>
+      </p:sp>
+      <p:sp>
+        <p:nvSpPr>
+          <p:cNvPr id="3" name="Content Placeholder 2"/>
+          <p:cNvSpPr>
+            <a:spLocks noGrp="1"/>
+          </p:cNvSpPr>
+          <p:nvPr>
+            <p:ph idx="1"/>
+          </p:nvPr>
+        </p:nvSpPr>
+        <p:spPr>
+          <a:xfrm>
+            <a:off x="504914" y="748856"/>
+            <a:ext cx="10972088" cy="3079660"/>
+          </a:xfrm>
+        </p:spPr>
+        <p:txBody>
+          <a:bodyPr>
+            <a:normAutofit lnSpcReduction="10000"/>
+          </a:bodyPr>
+          <a:lstStyle/>
+          <a:p>
+            <a:endParaRPr lang="en-US" dirty="0" smtClean="0"/>
+          </a:p>
+          <a:p>
+            <a:r>
+              <a:rPr lang="en-IN" dirty="0"/>
+              <a:t> </a:t>
+            </a:r>
+            <a:r>
+              <a:rPr lang="en-IN" dirty="0" err="1"/>
+              <a:t>var</a:t>
+            </a:r>
+            <a:r>
+              <a:rPr lang="en-IN" dirty="0"/>
+              <a:t> result = await _</a:t>
+            </a:r>
+            <a:r>
+              <a:rPr lang="en-IN" dirty="0" err="1"/>
+              <a:t>kernel.InvokePromptAsync</a:t>
+            </a:r>
+            <a:r>
+              <a:rPr lang="en-IN" dirty="0"/>
+              <a:t>(prompt</a:t>
+            </a:r>
+            <a:r>
+              <a:rPr lang="en-IN" dirty="0" smtClean="0"/>
+              <a:t>);</a:t>
+            </a:r>
+          </a:p>
+          <a:p>
+            <a:endParaRPr lang="en-US" dirty="0"/>
+          </a:p>
+          <a:p>
+            <a:r>
+              <a:rPr lang="en-US" dirty="0" smtClean="0"/>
+              <a:t>Internally</a:t>
+            </a:r>
+            <a:r>
+              <a:rPr lang="en-US" dirty="0"/>
+              <a:t>, </a:t>
+            </a:r>
+            <a:r>
+              <a:rPr lang="en-US" b="1" dirty="0" err="1"/>
+              <a:t>ChatCompletionAgent.InvokeAsync</a:t>
+            </a:r>
+            <a:r>
+              <a:rPr lang="en-US" b="1" dirty="0"/>
+              <a:t>(</a:t>
+            </a:r>
+            <a:r>
+              <a:rPr lang="en-US" b="1" dirty="0" err="1"/>
+              <a:t>chatHistory</a:t>
+            </a:r>
+            <a:r>
+              <a:rPr lang="en-US" dirty="0"/>
+              <a:t>) calls the registered </a:t>
+            </a:r>
+            <a:r>
+              <a:rPr lang="en-US" dirty="0" err="1"/>
+              <a:t>IChatCompletionService</a:t>
+            </a:r>
+            <a:r>
+              <a:rPr lang="en-US" dirty="0"/>
+              <a:t>, attaches the agent's instructions as a system message, sends the available plugin schemas to the LLM, and handles the reasoning loop:</a:t>
+            </a:r>
+          </a:p>
+          <a:p>
+            <a:endParaRPr lang="en-IN" dirty="0"/>
+          </a:p>
+        </p:txBody>
+      </p:sp>
+      <p:pic>
+        <p:nvPicPr>
+          <p:cNvPr id="2053" name="Picture 5" descr="https://miro.medium.com/v2/resize:fit:875/0*QZ25cifugOIglaXY"/>
+          <p:cNvPicPr>
+            <a:picLocks noChangeAspect="1" noChangeArrowheads="1"/>
+          </p:cNvPicPr>
+          <p:nvPr/>
+        </p:nvPicPr>
+        <p:blipFill>
+          <a:blip r:embed="rId2">
+            <a:extLst>
+              <a:ext uri="{28A0092B-C50C-407E-A947-70E740481C1C}">
+                <a14:useLocalDpi xmlns:a14="http://schemas.microsoft.com/office/drawing/2010/main" val="0"/>
+              </a:ext>
+            </a:extLst>
+          </a:blip>
+          <a:srcRect/>
+          <a:stretch>
+            <a:fillRect/>
+          </a:stretch>
+        </p:blipFill>
+        <p:spPr bwMode="auto">
+          <a:xfrm>
+            <a:off x="2505668" y="3624516"/>
+            <a:ext cx="5750607" cy="3233484"/>
+          </a:xfrm>
+          <a:prstGeom prst="rect">
+            <a:avLst/>
+          </a:prstGeom>
+          <a:noFill/>
+          <a:extLst>
+            <a:ext uri="{909E8E84-426E-40DD-AFC4-6F175D3DCCD1}">
+              <a14:hiddenFill xmlns:a14="http://schemas.microsoft.com/office/drawing/2010/main">
+                <a:solidFill>
+                  <a:srgbClr val="FFFFFF"/>
+                </a:solidFill>
+              </a14:hiddenFill>
+            </a:ext>
+          </a:extLst>
+        </p:spPr>
+      </p:pic>
+    </p:spTree>
+    <p:extLst>
+      <p:ext uri="{BB962C8B-B14F-4D97-AF65-F5344CB8AC3E}">
+        <p14:creationId xmlns:p14="http://schemas.microsoft.com/office/powerpoint/2010/main" val="112406441"/>
       </p:ext>
     </p:extLst>
   </p:cSld>
